--- a/neerlandais1/powerpoints/Om_te_L_infinitif_avec_te.pptx
+++ b/neerlandais1/powerpoints/Om_te_L_infinitif_avec_te.pptx
@@ -132,26 +132,26 @@
   <p:extLst>
     <p:ext uri="{521415D9-36F7-43E2-AB2F-B90AF26B5E84}">
       <p14:sectionLst xmlns:p14="http://schemas.microsoft.com/office/powerpoint/2010/main">
-        <p14:section name="Ouverture" id="{4c6cc2a5-be24-bd99-316e-9ae1501be1c2}">
+        <p14:section name="Ouverture" id="{dc1869a7-8286-c1ab-f4de-3ea499d1ee95}">
           <p14:sldIdLst>
             <p14:sldId id="256"/>
           </p14:sldIdLst>
         </p14:section>
-        <p14:section name="Découvrir" id="{47259db3-5605-77da-159f-168532a82c57}">
+        <p14:section name="Découvrir" id="{852fd2fb-d88c-671a-3b3f-61f1191dcbdb}">
           <p14:sldIdLst>
             <p14:sldId id="257"/>
             <p14:sldId id="258"/>
             <p14:sldId id="259"/>
           </p14:sldIdLst>
         </p14:section>
-        <p14:section name="Te ou pas te ?" id="{f4dd4af5-a5ab-436f-56d6-6efbc7deabaa}">
+        <p14:section name="Te ou pas te ?" id="{77af1894-bf0f-dd59-14b4-84d94f563dd3}">
           <p14:sldIdLst>
             <p14:sldId id="260"/>
             <p14:sldId id="261"/>
             <p14:sldId id="262"/>
           </p14:sldIdLst>
         </p14:section>
-        <p14:section name="Om … te" id="{25846beb-b3c5-9e0c-9432-8fceb7206b12}">
+        <p14:section name="Om … te" id="{7adf16f4-0823-ee1e-0bb8-6a3d4b6e9796}">
           <p14:sldIdLst>
             <p14:sldId id="263"/>
             <p14:sldId id="264"/>
@@ -162,7 +162,7 @@
             <p14:sldId id="269"/>
           </p14:sldIdLst>
         </p14:section>
-        <p14:section name="JIJ NU ! — Oefeningen" id="{edf61f00-1933-e884-140f-1497348fb0ad}">
+        <p14:section name="JIJ NU ! — Oefeningen" id="{c7d5eb14-4b61-5186-2a83-d009c2fbd52b}">
           <p14:sldIdLst>
             <p14:sldId id="270"/>
             <p14:sldId id="271"/>
@@ -177,7 +177,7 @@
             <p14:sldId id="280"/>
           </p14:sldIdLst>
         </p14:section>
-        <p14:section name="Clôture" id="{dc0e8130-438f-6fc0-4fad-9e76800f0989}">
+        <p14:section name="Clôture" id="{e2e3de16-4835-d070-7087-8d74d65a79db}">
           <p14:sldIdLst>
             <p14:sldId id="281"/>
           </p14:sldIdLst>

--- a/neerlandais1/powerpoints/Om_te_L_infinitif_avec_te.pptx
+++ b/neerlandais1/powerpoints/Om_te_L_infinitif_avec_te.pptx
@@ -132,26 +132,26 @@
   <p:extLst>
     <p:ext uri="{521415D9-36F7-43E2-AB2F-B90AF26B5E84}">
       <p14:sectionLst xmlns:p14="http://schemas.microsoft.com/office/powerpoint/2010/main">
-        <p14:section name="Ouverture" id="{dc1869a7-8286-c1ab-f4de-3ea499d1ee95}">
+        <p14:section name="Ouverture" id="{8c067a48-1e18-9a5d-1b0d-9d3712238fcc}">
           <p14:sldIdLst>
             <p14:sldId id="256"/>
           </p14:sldIdLst>
         </p14:section>
-        <p14:section name="Découvrir" id="{852fd2fb-d88c-671a-3b3f-61f1191dcbdb}">
+        <p14:section name="Découvrir" id="{61957693-fe8c-e336-4051-8fb680fd2475}">
           <p14:sldIdLst>
             <p14:sldId id="257"/>
             <p14:sldId id="258"/>
             <p14:sldId id="259"/>
           </p14:sldIdLst>
         </p14:section>
-        <p14:section name="Te ou pas te ?" id="{77af1894-bf0f-dd59-14b4-84d94f563dd3}">
+        <p14:section name="Te ou pas te ?" id="{588342d0-cea6-7c0d-aa4e-9d3786099b21}">
           <p14:sldIdLst>
             <p14:sldId id="260"/>
             <p14:sldId id="261"/>
             <p14:sldId id="262"/>
           </p14:sldIdLst>
         </p14:section>
-        <p14:section name="Om … te" id="{7adf16f4-0823-ee1e-0bb8-6a3d4b6e9796}">
+        <p14:section name="Om … te" id="{f1482479-432f-2519-848b-43bef3f6b907}">
           <p14:sldIdLst>
             <p14:sldId id="263"/>
             <p14:sldId id="264"/>
@@ -162,7 +162,7 @@
             <p14:sldId id="269"/>
           </p14:sldIdLst>
         </p14:section>
-        <p14:section name="JIJ NU ! — Oefeningen" id="{c7d5eb14-4b61-5186-2a83-d009c2fbd52b}">
+        <p14:section name="JIJ NU ! — Oefeningen" id="{7f6b9311-f3b7-bc24-b14b-4d5f9c0519cd}">
           <p14:sldIdLst>
             <p14:sldId id="270"/>
             <p14:sldId id="271"/>
@@ -177,7 +177,7 @@
             <p14:sldId id="280"/>
           </p14:sldIdLst>
         </p14:section>
-        <p14:section name="Clôture" id="{e2e3de16-4835-d070-7087-8d74d65a79db}">
+        <p14:section name="Clôture" id="{16183cfa-6885-7b12-b9dc-730a52abbe80}">
           <p14:sldIdLst>
             <p14:sldId id="281"/>
           </p14:sldIdLst>

--- a/neerlandais1/powerpoints/Om_te_L_infinitif_avec_te.pptx
+++ b/neerlandais1/powerpoints/Om_te_L_infinitif_avec_te.pptx
@@ -132,26 +132,26 @@
   <p:extLst>
     <p:ext uri="{521415D9-36F7-43E2-AB2F-B90AF26B5E84}">
       <p14:sectionLst xmlns:p14="http://schemas.microsoft.com/office/powerpoint/2010/main">
-        <p14:section name="Ouverture" id="{8c067a48-1e18-9a5d-1b0d-9d3712238fcc}">
+        <p14:section name="Ouverture" id="{c0b0ff1d-2eb5-32ed-ae86-a39e967fd46e}">
           <p14:sldIdLst>
             <p14:sldId id="256"/>
           </p14:sldIdLst>
         </p14:section>
-        <p14:section name="Découvrir" id="{61957693-fe8c-e336-4051-8fb680fd2475}">
+        <p14:section name="Découvrir" id="{65950ce8-8f9f-e848-5627-4999620932f7}">
           <p14:sldIdLst>
             <p14:sldId id="257"/>
             <p14:sldId id="258"/>
             <p14:sldId id="259"/>
           </p14:sldIdLst>
         </p14:section>
-        <p14:section name="Te ou pas te ?" id="{588342d0-cea6-7c0d-aa4e-9d3786099b21}">
+        <p14:section name="Te ou pas te ?" id="{c9cb7440-571e-d324-6f5d-b5e55460d91e}">
           <p14:sldIdLst>
             <p14:sldId id="260"/>
             <p14:sldId id="261"/>
             <p14:sldId id="262"/>
           </p14:sldIdLst>
         </p14:section>
-        <p14:section name="Om … te" id="{f1482479-432f-2519-848b-43bef3f6b907}">
+        <p14:section name="Om … te" id="{0420780a-01e6-21f1-d1cc-ad7fc85847e8}">
           <p14:sldIdLst>
             <p14:sldId id="263"/>
             <p14:sldId id="264"/>
@@ -162,7 +162,7 @@
             <p14:sldId id="269"/>
           </p14:sldIdLst>
         </p14:section>
-        <p14:section name="JIJ NU ! — Oefeningen" id="{7f6b9311-f3b7-bc24-b14b-4d5f9c0519cd}">
+        <p14:section name="JIJ NU ! — Oefeningen" id="{f96903ea-7760-c629-1196-debf81217258}">
           <p14:sldIdLst>
             <p14:sldId id="270"/>
             <p14:sldId id="271"/>
@@ -177,7 +177,7 @@
             <p14:sldId id="280"/>
           </p14:sldIdLst>
         </p14:section>
-        <p14:section name="Clôture" id="{16183cfa-6885-7b12-b9dc-730a52abbe80}">
+        <p14:section name="Clôture" id="{84cd5bbd-6f17-5730-9fe6-0d4fb6e94e17}">
           <p14:sldIdLst>
             <p14:sldId id="281"/>
           </p14:sldIdLst>
